--- a/tasks/finalpool/sf-canvas-training-impact-excel-ppt/groundtruth_workspace/Training_Impact_Presentation.pptx
+++ b/tasks/finalpool/sf-canvas-training-impact-excel-ppt/groundtruth_workspace/Training_Impact_Presentation.pptx
@@ -3098,7 +3098,7 @@
             <a:spLocks noGrp="1"/>
           </p:cNvSpPr>
           <p:nvPr>
-            <p:ph type="title"/>
+            <p:ph type="ctrTitle"/>
           </p:nvPr>
         </p:nvSpPr>
         <p:spPr/>
@@ -3114,21 +3114,21 @@
       </p:sp>
       <p:sp>
         <p:nvSpPr>
-          <p:cNvPr id="3" name="Content Placeholder 2"/>
-          <p:cNvSpPr>
-            <a:spLocks noGrp="1"/>
-          </p:cNvSpPr>
-          <p:nvPr>
-            <p:ph idx="1"/>
-          </p:nvPr>
-        </p:nvSpPr>
-        <p:spPr/>
-        <p:txBody>
-          <a:bodyPr/>
-          <a:lstStyle/>
-          <a:p>
-            <a:r>
-              <a:t>Content for Training Impact Analysis Report</a:t>
+          <p:cNvPr id="3" name="Subtitle 2"/>
+          <p:cNvSpPr>
+            <a:spLocks noGrp="1"/>
+          </p:cNvSpPr>
+          <p:nvPr>
+            <p:ph type="subTitle" idx="1"/>
+          </p:nvPr>
+        </p:nvSpPr>
+        <p:spPr/>
+        <p:txBody>
+          <a:bodyPr/>
+          <a:lstStyle/>
+          <a:p>
+            <a:r>
+              <a:t>Cross-functional review of training programs and performance ratings</a:t>
             </a:r>
           </a:p>
         </p:txBody>
@@ -3188,7 +3188,17 @@
           <a:lstStyle/>
           <a:p>
             <a:r>
-              <a:t>Content for Department Performance Highlights</a:t>
+              <a:t>Engineering: highest performing department (avg 3.21)</a:t>
+            </a:r>
+          </a:p>
+          <a:p>
+            <a:r>
+              <a:t>Operations: lowest performing department</a:t>
+            </a:r>
+          </a:p>
+          <a:p>
+            <a:r>
+              <a:t>Total employees: 50,000 across 7 departments</a:t>
             </a:r>
           </a:p>
         </p:txBody>
@@ -3248,7 +3258,12 @@
           <a:lstStyle/>
           <a:p>
             <a:r>
-              <a:t>Content for Course Enrollment and Performance</a:t>
+              <a:t>Most popular course: Applied Analytics &amp; Algorithms (Fall 2013)</a:t>
+            </a:r>
+          </a:p>
+          <a:p>
+            <a:r>
+              <a:t>Total courses analyzed: 22</a:t>
             </a:r>
           </a:p>
         </p:txBody>
@@ -3308,7 +3323,12 @@
           <a:lstStyle/>
           <a:p>
             <a:r>
-              <a:t>Content for Key Findings and Recommendations</a:t>
+              <a:t>Engineering employees show consistently strong performance ratings</a:t>
+            </a:r>
+          </a:p>
+          <a:p>
+            <a:r>
+              <a:t>Recommend targeted training programs for Operations team</a:t>
             </a:r>
           </a:p>
         </p:txBody>
